--- a/proposal/30praum-pitch-deck.pptx
+++ b/proposal/30praum-pitch-deck.pptx
@@ -5640,7 +5640,7 @@
                 <a:ea typeface="Arial Black" pitchFamily="34" charset="-122"/>
                 <a:cs typeface="Arial Black" pitchFamily="34" charset="-120"/>
               </a:rPr>
-              <a:t>R$ 148.000  ·  4 a 5 meses  ·  SLA R$ 9.500/mês desde mês 2</a:t>
+              <a:t>R$ 148.000  ·  4 a 5 meses  ·  SLA R$ 28.000/mês (time fixo)</a:t>
             </a:r>
             <a:endParaRPr lang="en-US" sz="1200" dirty="0"/>
           </a:p>
@@ -5851,7 +5851,7 @@
                 <a:ea typeface="Helvetica" pitchFamily="34" charset="-122"/>
                 <a:cs typeface="Helvetica" pitchFamily="34" charset="-120"/>
               </a:rPr>
-              <a:t>06 · QUATRO CAMINHOS</a:t>
+              <a:t>06 · TRÊS CAMINHOS</a:t>
             </a:r>
             <a:endParaRPr lang="en-US" sz="900" dirty="0"/>
           </a:p>
@@ -5890,7 +5890,7 @@
                 <a:ea typeface="Arial Black" pitchFamily="34" charset="-122"/>
                 <a:cs typeface="Arial Black" pitchFamily="34" charset="-120"/>
               </a:rPr>
-              <a:t>Vocês escolhem o ritmo da entrada.</a:t>
+              <a:t>Vocês escolhem o ritmo.</a:t>
             </a:r>
             <a:endParaRPr lang="en-US" sz="3000" dirty="0"/>
           </a:p>
@@ -5930,7 +5930,7 @@
         <p:spPr>
           <a:xfrm>
             <a:off x="457200" y="2103120"/>
-            <a:ext cx="2377440" cy="502920"/>
+            <a:ext cx="2560320" cy="640080"/>
           </a:xfrm>
           <a:prstGeom prst="rect">
             <a:avLst/>
@@ -5955,7 +5955,7 @@
         <p:spPr>
           <a:xfrm>
             <a:off x="566928" y="2103120"/>
-            <a:ext cx="2157984" cy="502920"/>
+            <a:ext cx="2340864" cy="640080"/>
           </a:xfrm>
           <a:prstGeom prst="rect">
             <a:avLst/>
@@ -5979,7 +5979,7 @@
                 <a:ea typeface="Helvetica" pitchFamily="34" charset="-122"/>
                 <a:cs typeface="Helvetica" pitchFamily="34" charset="-120"/>
               </a:rPr>
-              <a:t>CENÁRIO</a:t>
+              <a:t>PROPOSTA</a:t>
             </a:r>
             <a:endParaRPr lang="en-US" sz="900" dirty="0"/>
           </a:p>
@@ -5993,8 +5993,8 @@
         </p:nvSpPr>
         <p:spPr>
           <a:xfrm>
-            <a:off x="2834640" y="2103120"/>
-            <a:ext cx="3840480" cy="502920"/>
+            <a:off x="3017520" y="2103120"/>
+            <a:ext cx="3840480" cy="640080"/>
           </a:xfrm>
           <a:prstGeom prst="rect">
             <a:avLst/>
@@ -6018,8 +6018,8 @@
         </p:nvSpPr>
         <p:spPr>
           <a:xfrm>
-            <a:off x="2944368" y="2103120"/>
-            <a:ext cx="3621024" cy="502920"/>
+            <a:off x="3127248" y="2103120"/>
+            <a:ext cx="3621024" cy="640080"/>
           </a:xfrm>
           <a:prstGeom prst="rect">
             <a:avLst/>
@@ -6043,7 +6043,7 @@
                 <a:ea typeface="Helvetica" pitchFamily="34" charset="-122"/>
                 <a:cs typeface="Helvetica" pitchFamily="34" charset="-120"/>
               </a:rPr>
-              <a:t>DESCRIÇÃO</a:t>
+              <a:t>O QUE É</a:t>
             </a:r>
             <a:endParaRPr lang="en-US" sz="900" dirty="0"/>
           </a:p>
@@ -6057,8 +6057,8 @@
         </p:nvSpPr>
         <p:spPr>
           <a:xfrm>
-            <a:off x="6675120" y="2103120"/>
-            <a:ext cx="1188720" cy="502920"/>
+            <a:off x="6858000" y="2103120"/>
+            <a:ext cx="1097280" cy="640080"/>
           </a:xfrm>
           <a:prstGeom prst="rect">
             <a:avLst/>
@@ -6082,8 +6082,8 @@
         </p:nvSpPr>
         <p:spPr>
           <a:xfrm>
-            <a:off x="6784848" y="2103120"/>
-            <a:ext cx="969264" cy="502920"/>
+            <a:off x="6967728" y="2103120"/>
+            <a:ext cx="877824" cy="640080"/>
           </a:xfrm>
           <a:prstGeom prst="rect">
             <a:avLst/>
@@ -6121,8 +6121,8 @@
         </p:nvSpPr>
         <p:spPr>
           <a:xfrm>
-            <a:off x="7863840" y="2103120"/>
-            <a:ext cx="1280160" cy="502920"/>
+            <a:off x="7955280" y="2103120"/>
+            <a:ext cx="1188720" cy="640080"/>
           </a:xfrm>
           <a:prstGeom prst="rect">
             <a:avLst/>
@@ -6146,8 +6146,8 @@
         </p:nvSpPr>
         <p:spPr>
           <a:xfrm>
-            <a:off x="7973568" y="2103120"/>
-            <a:ext cx="1060704" cy="502920"/>
+            <a:off x="8065008" y="2103120"/>
+            <a:ext cx="969264" cy="640080"/>
           </a:xfrm>
           <a:prstGeom prst="rect">
             <a:avLst/>
@@ -6185,8 +6185,8 @@
         </p:nvSpPr>
         <p:spPr>
           <a:xfrm>
-            <a:off x="457200" y="2606040"/>
-            <a:ext cx="2377440" cy="502920"/>
+            <a:off x="457200" y="2743200"/>
+            <a:ext cx="2560320" cy="640080"/>
           </a:xfrm>
           <a:prstGeom prst="rect">
             <a:avLst/>
@@ -6210,8 +6210,8 @@
         </p:nvSpPr>
         <p:spPr>
           <a:xfrm>
-            <a:off x="566928" y="2606040"/>
-            <a:ext cx="2157984" cy="502920"/>
+            <a:off x="566928" y="2743200"/>
+            <a:ext cx="2340864" cy="640080"/>
           </a:xfrm>
           <a:prstGeom prst="rect">
             <a:avLst/>
@@ -6235,7 +6235,7 @@
                 <a:ea typeface="Helvetica" pitchFamily="34" charset="-122"/>
                 <a:cs typeface="Helvetica" pitchFamily="34" charset="-120"/>
               </a:rPr>
-              <a:t>A · Mínimo viável</a:t>
+              <a:t>P · Piloto pago</a:t>
             </a:r>
             <a:endParaRPr lang="en-US" sz="1000" dirty="0"/>
           </a:p>
@@ -6249,8 +6249,8 @@
         </p:nvSpPr>
         <p:spPr>
           <a:xfrm>
-            <a:off x="2834640" y="2606040"/>
-            <a:ext cx="3840480" cy="502920"/>
+            <a:off x="3017520" y="2743200"/>
+            <a:ext cx="3840480" cy="640080"/>
           </a:xfrm>
           <a:prstGeom prst="rect">
             <a:avLst/>
@@ -6274,8 +6274,8 @@
         </p:nvSpPr>
         <p:spPr>
           <a:xfrm>
-            <a:off x="2944368" y="2606040"/>
-            <a:ext cx="3621024" cy="502920"/>
+            <a:off x="3127248" y="2743200"/>
+            <a:ext cx="3621024" cy="640080"/>
           </a:xfrm>
           <a:prstGeom prst="rect">
             <a:avLst/>
@@ -6299,7 +6299,7 @@
                 <a:ea typeface="Helvetica" pitchFamily="34" charset="-122"/>
                 <a:cs typeface="Helvetica" pitchFamily="34" charset="-120"/>
               </a:rPr>
-              <a:t>Site + Shopify headless. Mantém ST.</a:t>
+              <a:t>90 dias · entrada pequena · perdem pouco</a:t>
             </a:r>
             <a:endParaRPr lang="en-US" sz="1000" dirty="0"/>
           </a:p>
@@ -6313,8 +6313,8 @@
         </p:nvSpPr>
         <p:spPr>
           <a:xfrm>
-            <a:off x="6675120" y="2606040"/>
-            <a:ext cx="1188720" cy="502920"/>
+            <a:off x="6858000" y="2743200"/>
+            <a:ext cx="1097280" cy="640080"/>
           </a:xfrm>
           <a:prstGeom prst="rect">
             <a:avLst/>
@@ -6338,8 +6338,8 @@
         </p:nvSpPr>
         <p:spPr>
           <a:xfrm>
-            <a:off x="6784848" y="2606040"/>
-            <a:ext cx="969264" cy="502920"/>
+            <a:off x="6967728" y="2743200"/>
+            <a:ext cx="877824" cy="640080"/>
           </a:xfrm>
           <a:prstGeom prst="rect">
             <a:avLst/>
@@ -6363,7 +6363,7 @@
                 <a:ea typeface="Helvetica" pitchFamily="34" charset="-122"/>
                 <a:cs typeface="Helvetica" pitchFamily="34" charset="-120"/>
               </a:rPr>
-              <a:t>R$ 95k</a:t>
+              <a:t>R$ 48k</a:t>
             </a:r>
             <a:endParaRPr lang="en-US" sz="1000" dirty="0"/>
           </a:p>
@@ -6377,8 +6377,8 @@
         </p:nvSpPr>
         <p:spPr>
           <a:xfrm>
-            <a:off x="7863840" y="2606040"/>
-            <a:ext cx="1280160" cy="502920"/>
+            <a:off x="7955280" y="2743200"/>
+            <a:ext cx="1188720" cy="640080"/>
           </a:xfrm>
           <a:prstGeom prst="rect">
             <a:avLst/>
@@ -6402,8 +6402,8 @@
         </p:nvSpPr>
         <p:spPr>
           <a:xfrm>
-            <a:off x="7973568" y="2606040"/>
-            <a:ext cx="1060704" cy="502920"/>
+            <a:off x="8065008" y="2743200"/>
+            <a:ext cx="969264" cy="640080"/>
           </a:xfrm>
           <a:prstGeom prst="rect">
             <a:avLst/>
@@ -6427,7 +6427,7 @@
                 <a:ea typeface="Helvetica" pitchFamily="34" charset="-122"/>
                 <a:cs typeface="Helvetica" pitchFamily="34" charset="-120"/>
               </a:rPr>
-              <a:t>R$ 6.5k</a:t>
+              <a:t>R$ 7.5k</a:t>
             </a:r>
             <a:endParaRPr lang="en-US" sz="1000" dirty="0"/>
           </a:p>
@@ -6441,8 +6441,8 @@
         </p:nvSpPr>
         <p:spPr>
           <a:xfrm>
-            <a:off x="457200" y="3108960"/>
-            <a:ext cx="2377440" cy="502920"/>
+            <a:off x="457200" y="3383280"/>
+            <a:ext cx="2560320" cy="640080"/>
           </a:xfrm>
           <a:prstGeom prst="rect">
             <a:avLst/>
@@ -6466,8 +6466,8 @@
         </p:nvSpPr>
         <p:spPr>
           <a:xfrm>
-            <a:off x="566928" y="3108960"/>
-            <a:ext cx="2157984" cy="502920"/>
+            <a:off x="566928" y="3383280"/>
+            <a:ext cx="2340864" cy="640080"/>
           </a:xfrm>
           <a:prstGeom prst="rect">
             <a:avLst/>
@@ -6491,7 +6491,7 @@
                 <a:ea typeface="Helvetica" pitchFamily="34" charset="-122"/>
                 <a:cs typeface="Helvetica" pitchFamily="34" charset="-120"/>
               </a:rPr>
-              <a:t>B · Híbrido — recomendado</a:t>
+              <a:t>G · Garantia — recomendado</a:t>
             </a:r>
             <a:endParaRPr lang="en-US" sz="1000" dirty="0"/>
           </a:p>
@@ -6505,8 +6505,8 @@
         </p:nvSpPr>
         <p:spPr>
           <a:xfrm>
-            <a:off x="2834640" y="3108960"/>
-            <a:ext cx="3840480" cy="502920"/>
+            <a:off x="3017520" y="3383280"/>
+            <a:ext cx="3840480" cy="640080"/>
           </a:xfrm>
           <a:prstGeom prst="rect">
             <a:avLst/>
@@ -6530,8 +6530,8 @@
         </p:nvSpPr>
         <p:spPr>
           <a:xfrm>
-            <a:off x="2944368" y="3108960"/>
-            <a:ext cx="3621024" cy="502920"/>
+            <a:off x="3127248" y="3383280"/>
+            <a:ext cx="3621024" cy="640080"/>
           </a:xfrm>
           <a:prstGeom prst="rect">
             <a:avLst/>
@@ -6555,7 +6555,7 @@
                 <a:ea typeface="Helvetica" pitchFamily="34" charset="-122"/>
                 <a:cs typeface="Helvetica" pitchFamily="34" charset="-120"/>
               </a:rPr>
-              <a:t>+ Plantão checkout próprio + workflow.</a:t>
+              <a:t>5 meses · money-back · time fixo no SLA</a:t>
             </a:r>
             <a:endParaRPr lang="en-US" sz="1000" dirty="0"/>
           </a:p>
@@ -6569,8 +6569,8 @@
         </p:nvSpPr>
         <p:spPr>
           <a:xfrm>
-            <a:off x="6675120" y="3108960"/>
-            <a:ext cx="1188720" cy="502920"/>
+            <a:off x="6858000" y="3383280"/>
+            <a:ext cx="1097280" cy="640080"/>
           </a:xfrm>
           <a:prstGeom prst="rect">
             <a:avLst/>
@@ -6594,8 +6594,8 @@
         </p:nvSpPr>
         <p:spPr>
           <a:xfrm>
-            <a:off x="6784848" y="3108960"/>
-            <a:ext cx="969264" cy="502920"/>
+            <a:off x="6967728" y="3383280"/>
+            <a:ext cx="877824" cy="640080"/>
           </a:xfrm>
           <a:prstGeom prst="rect">
             <a:avLst/>
@@ -6633,8 +6633,8 @@
         </p:nvSpPr>
         <p:spPr>
           <a:xfrm>
-            <a:off x="7863840" y="3108960"/>
-            <a:ext cx="1280160" cy="502920"/>
+            <a:off x="7955280" y="3383280"/>
+            <a:ext cx="1188720" cy="640080"/>
           </a:xfrm>
           <a:prstGeom prst="rect">
             <a:avLst/>
@@ -6658,8 +6658,8 @@
         </p:nvSpPr>
         <p:spPr>
           <a:xfrm>
-            <a:off x="7973568" y="3108960"/>
-            <a:ext cx="1060704" cy="502920"/>
+            <a:off x="8065008" y="3383280"/>
+            <a:ext cx="969264" cy="640080"/>
           </a:xfrm>
           <a:prstGeom prst="rect">
             <a:avLst/>
@@ -6683,7 +6683,7 @@
                 <a:ea typeface="Helvetica" pitchFamily="34" charset="-122"/>
                 <a:cs typeface="Helvetica" pitchFamily="34" charset="-120"/>
               </a:rPr>
-              <a:t>R$ 9.5k</a:t>
+              <a:t>R$ 28k</a:t>
             </a:r>
             <a:endParaRPr lang="en-US" sz="1000" dirty="0"/>
           </a:p>
@@ -6697,8 +6697,8 @@
         </p:nvSpPr>
         <p:spPr>
           <a:xfrm>
-            <a:off x="457200" y="3611880"/>
-            <a:ext cx="2377440" cy="502920"/>
+            <a:off x="457200" y="4023360"/>
+            <a:ext cx="2560320" cy="640080"/>
           </a:xfrm>
           <a:prstGeom prst="rect">
             <a:avLst/>
@@ -6722,8 +6722,8 @@
         </p:nvSpPr>
         <p:spPr>
           <a:xfrm>
-            <a:off x="566928" y="3611880"/>
-            <a:ext cx="2157984" cy="502920"/>
+            <a:off x="566928" y="4023360"/>
+            <a:ext cx="2340864" cy="640080"/>
           </a:xfrm>
           <a:prstGeom prst="rect">
             <a:avLst/>
@@ -6747,7 +6747,7 @@
                 <a:ea typeface="Helvetica" pitchFamily="34" charset="-122"/>
                 <a:cs typeface="Helvetica" pitchFamily="34" charset="-120"/>
               </a:rPr>
-              <a:t>C · Acelerado</a:t>
+              <a:t>E · Time embedded</a:t>
             </a:r>
             <a:endParaRPr lang="en-US" sz="1000" dirty="0"/>
           </a:p>
@@ -6761,8 +6761,8 @@
         </p:nvSpPr>
         <p:spPr>
           <a:xfrm>
-            <a:off x="2834640" y="3611880"/>
-            <a:ext cx="3840480" cy="502920"/>
+            <a:off x="3017520" y="4023360"/>
+            <a:ext cx="3840480" cy="640080"/>
           </a:xfrm>
           <a:prstGeom prst="rect">
             <a:avLst/>
@@ -6786,8 +6786,8 @@
         </p:nvSpPr>
         <p:spPr>
           <a:xfrm>
-            <a:off x="2944368" y="3611880"/>
-            <a:ext cx="3621024" cy="502920"/>
+            <a:off x="3127248" y="4023360"/>
+            <a:ext cx="3621024" cy="640080"/>
           </a:xfrm>
           <a:prstGeom prst="rect">
             <a:avLst/>
@@ -6811,7 +6811,7 @@
                 <a:ea typeface="Helvetica" pitchFamily="34" charset="-122"/>
                 <a:cs typeface="Helvetica" pitchFamily="34" charset="-120"/>
               </a:rPr>
-              <a:t>+ E-commerce próprio (sai Shopify).</a:t>
+              <a:t>Sem entrega · Alvaro + Cauã fixos · escala</a:t>
             </a:r>
             <a:endParaRPr lang="en-US" sz="1000" dirty="0"/>
           </a:p>
@@ -6825,8 +6825,8 @@
         </p:nvSpPr>
         <p:spPr>
           <a:xfrm>
-            <a:off x="6675120" y="3611880"/>
-            <a:ext cx="1188720" cy="502920"/>
+            <a:off x="6858000" y="4023360"/>
+            <a:ext cx="1097280" cy="640080"/>
           </a:xfrm>
           <a:prstGeom prst="rect">
             <a:avLst/>
@@ -6850,8 +6850,8 @@
         </p:nvSpPr>
         <p:spPr>
           <a:xfrm>
-            <a:off x="6784848" y="3611880"/>
-            <a:ext cx="969264" cy="502920"/>
+            <a:off x="6967728" y="4023360"/>
+            <a:ext cx="877824" cy="640080"/>
           </a:xfrm>
           <a:prstGeom prst="rect">
             <a:avLst/>
@@ -6875,7 +6875,7 @@
                 <a:ea typeface="Helvetica" pitchFamily="34" charset="-122"/>
                 <a:cs typeface="Helvetica" pitchFamily="34" charset="-120"/>
               </a:rPr>
-              <a:t>R$ 208k</a:t>
+              <a:t>—</a:t>
             </a:r>
             <a:endParaRPr lang="en-US" sz="1000" dirty="0"/>
           </a:p>
@@ -6889,8 +6889,8 @@
         </p:nvSpPr>
         <p:spPr>
           <a:xfrm>
-            <a:off x="7863840" y="3611880"/>
-            <a:ext cx="1280160" cy="502920"/>
+            <a:off x="7955280" y="4023360"/>
+            <a:ext cx="1188720" cy="640080"/>
           </a:xfrm>
           <a:prstGeom prst="rect">
             <a:avLst/>
@@ -6914,8 +6914,8 @@
         </p:nvSpPr>
         <p:spPr>
           <a:xfrm>
-            <a:off x="7973568" y="3611880"/>
-            <a:ext cx="1060704" cy="502920"/>
+            <a:off x="8065008" y="4023360"/>
+            <a:ext cx="969264" cy="640080"/>
           </a:xfrm>
           <a:prstGeom prst="rect">
             <a:avLst/>
@@ -6939,7 +6939,7 @@
                 <a:ea typeface="Helvetica" pitchFamily="34" charset="-122"/>
                 <a:cs typeface="Helvetica" pitchFamily="34" charset="-120"/>
               </a:rPr>
-              <a:t>R$ 13k</a:t>
+              <a:t>R$ 22-42k</a:t>
             </a:r>
             <a:endParaRPr lang="en-US" sz="1000" dirty="0"/>
           </a:p>
@@ -6947,263 +6947,7 @@
       </p:sp>
       <p:sp>
         <p:nvSpPr>
-          <p:cNvPr id="41" name="Shape 39"/>
-          <p:cNvSpPr/>
-          <p:nvPr/>
-        </p:nvSpPr>
-        <p:spPr>
-          <a:xfrm>
-            <a:off x="457200" y="4114800"/>
-            <a:ext cx="2377440" cy="502920"/>
-          </a:xfrm>
-          <a:prstGeom prst="rect">
-            <a:avLst/>
-          </a:prstGeom>
-          <a:solidFill>
-            <a:srgbClr val="F5F4F1"/>
-          </a:solidFill>
-          <a:ln w="3810">
-            <a:solidFill>
-              <a:srgbClr val="DEDEDE"/>
-            </a:solidFill>
-            <a:prstDash val="solid"/>
-          </a:ln>
-        </p:spPr>
-      </p:sp>
-      <p:sp>
-        <p:nvSpPr>
-          <p:cNvPr id="42" name="Text 40"/>
-          <p:cNvSpPr/>
-          <p:nvPr/>
-        </p:nvSpPr>
-        <p:spPr>
-          <a:xfrm>
-            <a:off x="566928" y="4114800"/>
-            <a:ext cx="2157984" cy="502920"/>
-          </a:xfrm>
-          <a:prstGeom prst="rect">
-            <a:avLst/>
-          </a:prstGeom>
-          <a:noFill/>
-          <a:ln/>
-        </p:spPr>
-        <p:txBody>
-          <a:bodyPr wrap="square" rtlCol="0" anchor="ctr"/>
-          <a:lstStyle/>
-          <a:p>
-            <a:pPr indent="0" marL="0">
-              <a:buNone/>
-            </a:pPr>
-            <a:r>
-              <a:rPr lang="en-US" sz="1000" b="1" dirty="0">
-                <a:solidFill>
-                  <a:srgbClr val="0A0A0A"/>
-                </a:solidFill>
-                <a:latin typeface="Helvetica" pitchFamily="34" charset="0"/>
-                <a:ea typeface="Helvetica" pitchFamily="34" charset="-122"/>
-                <a:cs typeface="Helvetica" pitchFamily="34" charset="-120"/>
-              </a:rPr>
-              <a:t>D · Time fixo + PLR</a:t>
-            </a:r>
-            <a:endParaRPr lang="en-US" sz="1000" dirty="0"/>
-          </a:p>
-        </p:txBody>
-      </p:sp>
-      <p:sp>
-        <p:nvSpPr>
-          <p:cNvPr id="43" name="Shape 41"/>
-          <p:cNvSpPr/>
-          <p:nvPr/>
-        </p:nvSpPr>
-        <p:spPr>
-          <a:xfrm>
-            <a:off x="2834640" y="4114800"/>
-            <a:ext cx="3840480" cy="502920"/>
-          </a:xfrm>
-          <a:prstGeom prst="rect">
-            <a:avLst/>
-          </a:prstGeom>
-          <a:solidFill>
-            <a:srgbClr val="F5F4F1"/>
-          </a:solidFill>
-          <a:ln w="3810">
-            <a:solidFill>
-              <a:srgbClr val="DEDEDE"/>
-            </a:solidFill>
-            <a:prstDash val="solid"/>
-          </a:ln>
-        </p:spPr>
-      </p:sp>
-      <p:sp>
-        <p:nvSpPr>
-          <p:cNvPr id="44" name="Text 42"/>
-          <p:cNvSpPr/>
-          <p:nvPr/>
-        </p:nvSpPr>
-        <p:spPr>
-          <a:xfrm>
-            <a:off x="2944368" y="4114800"/>
-            <a:ext cx="3621024" cy="502920"/>
-          </a:xfrm>
-          <a:prstGeom prst="rect">
-            <a:avLst/>
-          </a:prstGeom>
-          <a:noFill/>
-          <a:ln/>
-        </p:spPr>
-        <p:txBody>
-          <a:bodyPr wrap="square" rtlCol="0" anchor="ctr"/>
-          <a:lstStyle/>
-          <a:p>
-            <a:pPr indent="0" marL="0">
-              <a:buNone/>
-            </a:pPr>
-            <a:r>
-              <a:rPr lang="en-US" sz="1000" dirty="0">
-                <a:solidFill>
-                  <a:srgbClr val="0A0A0A"/>
-                </a:solidFill>
-                <a:latin typeface="Helvetica" pitchFamily="34" charset="0"/>
-                <a:ea typeface="Helvetica" pitchFamily="34" charset="-122"/>
-                <a:cs typeface="Helvetica" pitchFamily="34" charset="-120"/>
-              </a:rPr>
-              <a:t>Parceria contínua. Fixo + variável.</a:t>
-            </a:r>
-            <a:endParaRPr lang="en-US" sz="1000" dirty="0"/>
-          </a:p>
-        </p:txBody>
-      </p:sp>
-      <p:sp>
-        <p:nvSpPr>
-          <p:cNvPr id="45" name="Shape 43"/>
-          <p:cNvSpPr/>
-          <p:nvPr/>
-        </p:nvSpPr>
-        <p:spPr>
-          <a:xfrm>
-            <a:off x="6675120" y="4114800"/>
-            <a:ext cx="1188720" cy="502920"/>
-          </a:xfrm>
-          <a:prstGeom prst="rect">
-            <a:avLst/>
-          </a:prstGeom>
-          <a:solidFill>
-            <a:srgbClr val="F5F4F1"/>
-          </a:solidFill>
-          <a:ln w="3810">
-            <a:solidFill>
-              <a:srgbClr val="DEDEDE"/>
-            </a:solidFill>
-            <a:prstDash val="solid"/>
-          </a:ln>
-        </p:spPr>
-      </p:sp>
-      <p:sp>
-        <p:nvSpPr>
-          <p:cNvPr id="46" name="Text 44"/>
-          <p:cNvSpPr/>
-          <p:nvPr/>
-        </p:nvSpPr>
-        <p:spPr>
-          <a:xfrm>
-            <a:off x="6784848" y="4114800"/>
-            <a:ext cx="969264" cy="502920"/>
-          </a:xfrm>
-          <a:prstGeom prst="rect">
-            <a:avLst/>
-          </a:prstGeom>
-          <a:noFill/>
-          <a:ln/>
-        </p:spPr>
-        <p:txBody>
-          <a:bodyPr wrap="square" rtlCol="0" anchor="ctr"/>
-          <a:lstStyle/>
-          <a:p>
-            <a:pPr indent="0" marL="0">
-              <a:buNone/>
-            </a:pPr>
-            <a:r>
-              <a:rPr lang="en-US" sz="1000" b="1" dirty="0">
-                <a:solidFill>
-                  <a:srgbClr val="0A0A0A"/>
-                </a:solidFill>
-                <a:latin typeface="Helvetica" pitchFamily="34" charset="0"/>
-                <a:ea typeface="Helvetica" pitchFamily="34" charset="-122"/>
-                <a:cs typeface="Helvetica" pitchFamily="34" charset="-120"/>
-              </a:rPr>
-              <a:t>—</a:t>
-            </a:r>
-            <a:endParaRPr lang="en-US" sz="1000" dirty="0"/>
-          </a:p>
-        </p:txBody>
-      </p:sp>
-      <p:sp>
-        <p:nvSpPr>
-          <p:cNvPr id="47" name="Shape 45"/>
-          <p:cNvSpPr/>
-          <p:nvPr/>
-        </p:nvSpPr>
-        <p:spPr>
-          <a:xfrm>
-            <a:off x="7863840" y="4114800"/>
-            <a:ext cx="1280160" cy="502920"/>
-          </a:xfrm>
-          <a:prstGeom prst="rect">
-            <a:avLst/>
-          </a:prstGeom>
-          <a:solidFill>
-            <a:srgbClr val="F5F4F1"/>
-          </a:solidFill>
-          <a:ln w="3810">
-            <a:solidFill>
-              <a:srgbClr val="DEDEDE"/>
-            </a:solidFill>
-            <a:prstDash val="solid"/>
-          </a:ln>
-        </p:spPr>
-      </p:sp>
-      <p:sp>
-        <p:nvSpPr>
-          <p:cNvPr id="48" name="Text 46"/>
-          <p:cNvSpPr/>
-          <p:nvPr/>
-        </p:nvSpPr>
-        <p:spPr>
-          <a:xfrm>
-            <a:off x="7973568" y="4114800"/>
-            <a:ext cx="1060704" cy="502920"/>
-          </a:xfrm>
-          <a:prstGeom prst="rect">
-            <a:avLst/>
-          </a:prstGeom>
-          <a:noFill/>
-          <a:ln/>
-        </p:spPr>
-        <p:txBody>
-          <a:bodyPr wrap="square" rtlCol="0" anchor="ctr"/>
-          <a:lstStyle/>
-          <a:p>
-            <a:pPr indent="0" marL="0">
-              <a:buNone/>
-            </a:pPr>
-            <a:r>
-              <a:rPr lang="en-US" sz="1000" b="1" dirty="0">
-                <a:solidFill>
-                  <a:srgbClr val="0A0A0A"/>
-                </a:solidFill>
-                <a:latin typeface="Helvetica" pitchFamily="34" charset="0"/>
-                <a:ea typeface="Helvetica" pitchFamily="34" charset="-122"/>
-                <a:cs typeface="Helvetica" pitchFamily="34" charset="-120"/>
-              </a:rPr>
-              <a:t>R$ 18k+</a:t>
-            </a:r>
-            <a:endParaRPr lang="en-US" sz="1000" dirty="0"/>
-          </a:p>
-        </p:txBody>
-      </p:sp>
-      <p:sp>
-        <p:nvSpPr>
-          <p:cNvPr id="49" name="Text 47"/>
+          <p:cNvPr id="41" name="Text 39"/>
           <p:cNvSpPr/>
           <p:nvPr/>
         </p:nvSpPr>
@@ -7234,7 +6978,7 @@
                 <a:ea typeface="Helvetica" pitchFamily="34" charset="-122"/>
                 <a:cs typeface="Helvetica" pitchFamily="34" charset="-120"/>
               </a:rPr>
-              <a:t>Começar pelo B. Evoluir pra C ou D quando bater confiança. Sem lock-in: troca de cenário com aviso de 60 dias.</a:t>
+              <a:t>SLA da Proposta G inclui salário fixo do time (Alvaro + Cauã) · não é hora de dev · é folha terceirizada.</a:t>
             </a:r>
             <a:endParaRPr lang="en-US" sz="1000" dirty="0"/>
           </a:p>
@@ -7484,7 +7228,7 @@
                 <a:ea typeface="Arial Black" pitchFamily="34" charset="-122"/>
                 <a:cs typeface="Arial Black" pitchFamily="34" charset="-120"/>
               </a:rPr>
-              <a:t>Paga sozinho em 1 edição.</a:t>
+              <a:t>Mais barato que contratar 2 internos.</a:t>
             </a:r>
             <a:endParaRPr lang="en-US" sz="3000" dirty="0"/>
           </a:p>
@@ -7548,7 +7292,7 @@
                 <a:ea typeface="Helvetica" pitchFamily="34" charset="-122"/>
                 <a:cs typeface="Helvetica" pitchFamily="34" charset="-120"/>
               </a:rPr>
-              <a:t>PAYBACK</a:t>
+              <a:t>ECONOMIA VS CLT</a:t>
             </a:r>
             <a:endParaRPr lang="en-US" sz="900" dirty="0"/>
           </a:p>
@@ -7587,7 +7331,7 @@
                 <a:ea typeface="Arial Black" pitchFamily="34" charset="-122"/>
                 <a:cs typeface="Arial Black" pitchFamily="34" charset="-120"/>
               </a:rPr>
-              <a:t>1 edição</a:t>
+              <a:t>R$ 432k</a:t>
             </a:r>
             <a:endParaRPr lang="en-US" sz="6000" dirty="0"/>
           </a:p>
@@ -7626,7 +7370,7 @@
                 <a:ea typeface="Helvetica" pitchFamily="34" charset="-122"/>
                 <a:cs typeface="Helvetica" pitchFamily="34" charset="-120"/>
               </a:rPr>
-              <a:t>do Plantão sem ST</a:t>
+              <a:t>por ano vs 2 devs CLT</a:t>
             </a:r>
             <a:endParaRPr lang="en-US" sz="1800" dirty="0"/>
           </a:p>
@@ -7665,7 +7409,7 @@
                 <a:ea typeface="Helvetica" pitchFamily="34" charset="-122"/>
                 <a:cs typeface="Helvetica" pitchFamily="34" charset="-120"/>
               </a:rPr>
-              <a:t>≈ R$ 300.000 de economia direta</a:t>
+              <a:t>sem encargos, sem férias, sem rescisão</a:t>
             </a:r>
             <a:endParaRPr lang="en-US" sz="1200" dirty="0"/>
           </a:p>
@@ -7704,7 +7448,7 @@
                 <a:ea typeface="Helvetica" pitchFamily="34" charset="-122"/>
                 <a:cs typeface="Helvetica" pitchFamily="34" charset="-120"/>
               </a:rPr>
-              <a:t>ANO 1 vs HOJE</a:t>
+              <a:t>CONTRATAR CLT vs SLA</a:t>
             </a:r>
             <a:endParaRPr lang="en-US" sz="900" dirty="0"/>
           </a:p>
@@ -7743,7 +7487,7 @@
                 <a:ea typeface="Helvetica" pitchFamily="34" charset="-122"/>
                 <a:cs typeface="Helvetica" pitchFamily="34" charset="-120"/>
               </a:rPr>
-              <a:t>Shopify Plus → Basic</a:t>
+              <a:t>2 devs sêniores CLT/mês*</a:t>
             </a:r>
             <a:endParaRPr lang="en-US" sz="1100" dirty="0"/>
           </a:p>
@@ -7776,13 +7520,13 @@
             <a:r>
               <a:rPr lang="en-US" sz="1100" b="1" dirty="0">
                 <a:solidFill>
-                  <a:srgbClr val="2F7D4F"/>
-                </a:solidFill>
-                <a:latin typeface="Helvetica" pitchFamily="34" charset="0"/>
-                <a:ea typeface="Helvetica" pitchFamily="34" charset="-122"/>
-                <a:cs typeface="Helvetica" pitchFamily="34" charset="-120"/>
-              </a:rPr>
-              <a:t>–R$ 139.800</a:t>
+                  <a:srgbClr val="7A7A7A"/>
+                </a:solidFill>
+                <a:latin typeface="Helvetica" pitchFamily="34" charset="0"/>
+                <a:ea typeface="Helvetica" pitchFamily="34" charset="-122"/>
+                <a:cs typeface="Helvetica" pitchFamily="34" charset="-120"/>
+              </a:rPr>
+              <a:t>R$ 64.000</a:t>
             </a:r>
             <a:endParaRPr lang="en-US" sz="1100" dirty="0"/>
           </a:p>
@@ -7844,7 +7588,7 @@
                 <a:ea typeface="Helvetica" pitchFamily="34" charset="-122"/>
                 <a:cs typeface="Helvetica" pitchFamily="34" charset="-120"/>
               </a:rPr>
-              <a:t>Taxa ST (1 edição)</a:t>
+              <a:t>SLA Proposta G/mês</a:t>
             </a:r>
             <a:endParaRPr lang="en-US" sz="1100" dirty="0"/>
           </a:p>
@@ -7877,13 +7621,13 @@
             <a:r>
               <a:rPr lang="en-US" sz="1100" b="1" dirty="0">
                 <a:solidFill>
-                  <a:srgbClr val="2F7D4F"/>
-                </a:solidFill>
-                <a:latin typeface="Helvetica" pitchFamily="34" charset="0"/>
-                <a:ea typeface="Helvetica" pitchFamily="34" charset="-122"/>
-                <a:cs typeface="Helvetica" pitchFamily="34" charset="-120"/>
-              </a:rPr>
-              <a:t>–R$ 300.000</a:t>
+                  <a:srgbClr val="7A7A7A"/>
+                </a:solidFill>
+                <a:latin typeface="Helvetica" pitchFamily="34" charset="0"/>
+                <a:ea typeface="Helvetica" pitchFamily="34" charset="-122"/>
+                <a:cs typeface="Helvetica" pitchFamily="34" charset="-120"/>
+              </a:rPr>
+              <a:t>R$ 28.000</a:t>
             </a:r>
             <a:endParaRPr lang="en-US" sz="1100" dirty="0"/>
           </a:p>
@@ -7945,7 +7689,7 @@
                 <a:ea typeface="Helvetica" pitchFamily="34" charset="-122"/>
                 <a:cs typeface="Helvetica" pitchFamily="34" charset="-120"/>
               </a:rPr>
-              <a:t>Entrega plataforma</a:t>
+              <a:t>Diferença mensal</a:t>
             </a:r>
             <a:endParaRPr lang="en-US" sz="1100" dirty="0"/>
           </a:p>
@@ -7978,13 +7722,13 @@
             <a:r>
               <a:rPr lang="en-US" sz="1100" b="1" dirty="0">
                 <a:solidFill>
-                  <a:srgbClr val="7A7A7A"/>
-                </a:solidFill>
-                <a:latin typeface="Helvetica" pitchFamily="34" charset="0"/>
-                <a:ea typeface="Helvetica" pitchFamily="34" charset="-122"/>
-                <a:cs typeface="Helvetica" pitchFamily="34" charset="-120"/>
-              </a:rPr>
-              <a:t>+R$ 148.000</a:t>
+                  <a:srgbClr val="2F7D4F"/>
+                </a:solidFill>
+                <a:latin typeface="Helvetica" pitchFamily="34" charset="0"/>
+                <a:ea typeface="Helvetica" pitchFamily="34" charset="-122"/>
+                <a:cs typeface="Helvetica" pitchFamily="34" charset="-120"/>
+              </a:rPr>
+              <a:t>–R$ 36.000</a:t>
             </a:r>
             <a:endParaRPr lang="en-US" sz="1100" dirty="0"/>
           </a:p>
@@ -8046,7 +7790,7 @@
                 <a:ea typeface="Helvetica" pitchFamily="34" charset="-122"/>
                 <a:cs typeface="Helvetica" pitchFamily="34" charset="-120"/>
               </a:rPr>
-              <a:t>SLA × 12 meses</a:t>
+              <a:t>Economia anual</a:t>
             </a:r>
             <a:endParaRPr lang="en-US" sz="1100" dirty="0"/>
           </a:p>
@@ -8079,13 +7823,13 @@
             <a:r>
               <a:rPr lang="en-US" sz="1100" b="1" dirty="0">
                 <a:solidFill>
-                  <a:srgbClr val="7A7A7A"/>
-                </a:solidFill>
-                <a:latin typeface="Helvetica" pitchFamily="34" charset="0"/>
-                <a:ea typeface="Helvetica" pitchFamily="34" charset="-122"/>
-                <a:cs typeface="Helvetica" pitchFamily="34" charset="-120"/>
-              </a:rPr>
-              <a:t>+R$ 114.000</a:t>
+                  <a:srgbClr val="2F7D4F"/>
+                </a:solidFill>
+                <a:latin typeface="Helvetica" pitchFamily="34" charset="0"/>
+                <a:ea typeface="Helvetica" pitchFamily="34" charset="-122"/>
+                <a:cs typeface="Helvetica" pitchFamily="34" charset="-120"/>
+              </a:rPr>
+              <a:t>–R$ 432.000</a:t>
             </a:r>
             <a:endParaRPr lang="en-US" sz="1100" dirty="0"/>
           </a:p>
@@ -8172,7 +7916,7 @@
                 <a:ea typeface="Helvetica" pitchFamily="34" charset="-122"/>
                 <a:cs typeface="Helvetica" pitchFamily="34" charset="-120"/>
               </a:rPr>
-              <a:t>ECONOMIA LÍQUIDA · ANO 1</a:t>
+              <a:t>ECONOMIA ANUAL EM EQUIPE</a:t>
             </a:r>
             <a:endParaRPr lang="en-US" sz="900" dirty="0"/>
           </a:p>
@@ -8211,9 +7955,48 @@
                 <a:ea typeface="Arial Black" pitchFamily="34" charset="-122"/>
                 <a:cs typeface="Arial Black" pitchFamily="34" charset="-120"/>
               </a:rPr>
-              <a:t>R$ 177.800</a:t>
+              <a:t>R$ 432.000</a:t>
             </a:r>
             <a:endParaRPr lang="en-US" sz="1400" dirty="0"/>
+          </a:p>
+        </p:txBody>
+      </p:sp>
+      <p:sp>
+        <p:nvSpPr>
+          <p:cNvPr id="29" name="Text 27"/>
+          <p:cNvSpPr/>
+          <p:nvPr/>
+        </p:nvSpPr>
+        <p:spPr>
+          <a:xfrm>
+            <a:off x="457200" y="4457700"/>
+            <a:ext cx="8229600" cy="228600"/>
+          </a:xfrm>
+          <a:prstGeom prst="rect">
+            <a:avLst/>
+          </a:prstGeom>
+          <a:noFill/>
+          <a:ln/>
+        </p:spPr>
+        <p:txBody>
+          <a:bodyPr wrap="square" rtlCol="0" anchor="ctr"/>
+          <a:lstStyle/>
+          <a:p>
+            <a:pPr indent="0" marL="0">
+              <a:buNone/>
+            </a:pPr>
+            <a:r>
+              <a:rPr lang="en-US" sz="800" i="1" dirty="0">
+                <a:solidFill>
+                  <a:srgbClr val="7A7A7A"/>
+                </a:solidFill>
+                <a:latin typeface="Helvetica" pitchFamily="34" charset="0"/>
+                <a:ea typeface="Helvetica" pitchFamily="34" charset="-122"/>
+                <a:cs typeface="Helvetica" pitchFamily="34" charset="-120"/>
+              </a:rPr>
+              <a:t>* 2 devs sêniores em SP: R$ 18k salário + 80% encargos sociais = ~R$ 32k/mês cada. Soma R$ 64k/mês.</a:t>
+            </a:r>
+            <a:endParaRPr lang="en-US" sz="800" dirty="0"/>
           </a:p>
         </p:txBody>
       </p:sp>
